--- a/pptx-output/07-repo-workflows-github-and-azure-devops.pptx
+++ b/pptx-output/07-repo-workflows-github-and-azure-devops.pptx
@@ -1294,7 +1294,7 @@
           <a:lstStyle/>
           <a:p>
             <a:r>
-              <a:t>Business meaning should not drift because wording improved.</a:t>
+              <a:t>Walk through the diff format. The `-` lines are removals, `+` lines are additions. The AI expanded the Gross Margin definition (likely an improvement) and added a new metric (Gross Margin %) that may not be approved. Ask: who owns the authority to add new KPIs? This is a real governance question that a code review alone cannot answer.</a:t>
             </a:r>
           </a:p>
         </p:txBody>
@@ -1364,7 +1364,7 @@
           <a:lstStyle/>
           <a:p>
             <a:r>
-              <a:t>Separate support content from analysis changes.</a:t>
+              <a:t>The AI upgraded Python 3.10 to 3.12 and added useful prerequisite details. But the version bump may break CI or team environments still on 3.10. Ask: did anyone request the Python upgrade? The data and seed additions are clearly helpful. The right call may be Revise -- keep the new lines but revert the Python version change.</a:t>
             </a:r>
           </a:p>
         </p:txBody>
@@ -1434,7 +1434,7 @@
           <a:lstStyle/>
           <a:p>
             <a:r>
-              <a:t>For DE work, reviewability and operational safety come first.</a:t>
+              <a:t>The AI replaced a vague "retry manually" step with a structured troubleshooting sequence. This is a clear improvement. But ask: is 3 retries correct? Is paging the on-call DE the right escalation, or should it go to the team lead first? Operational runbooks must match the actual incident process. The diff looks great, but the DE must verify every step against reality.</a:t>
             </a:r>
           </a:p>
         </p:txBody>
@@ -11405,7 +11405,7 @@
                 </a:solidFill>
                 <a:latin typeface="Segoe UI"/>
               </a:rPr>
-              <a:t>BI Example</a:t>
+              <a:t>BI Example -- Repo Diff Review</a:t>
             </a:r>
           </a:p>
         </p:txBody>
@@ -11534,7 +11534,7 @@
                 </a:solidFill>
                 <a:latin typeface="Segoe UI"/>
               </a:rPr>
-              <a:t>improve a sales KPI glossary section in a repo README</a:t>
+              <a:t>Scenario: Copilot updated a KPI glossary in a shared repo. Review the diff before merge.</a:t>
             </a:r>
           </a:p>
           <a:p>
@@ -11562,7 +11562,91 @@
                 </a:solidFill>
                 <a:latin typeface="Segoe UI"/>
               </a:rPr>
-              <a:t>keep gross margin and net sales definitions unchanged</a:t>
+              <a:t>**Gross Margin**: Revenue minus cost.</a:t>
+            </a:r>
+          </a:p>
+          <a:p>
+            <a:pPr>
+              <a:spcBef>
+                <a:spcPts val="400"/>
+              </a:spcBef>
+              <a:spcAft>
+                <a:spcPts val="800"/>
+              </a:spcAft>
+            </a:pPr>
+            <a:r>
+              <a:rPr sz="1600">
+                <a:solidFill>
+                  <a:srgbClr val="2ECC71"/>
+                </a:solidFill>
+                <a:latin typeface="Segoe UI"/>
+              </a:rPr>
+              <a:t>●  </a:t>
+            </a:r>
+            <a:r>
+              <a:rPr sz="1800">
+                <a:solidFill>
+                  <a:srgbClr val="2C3E50"/>
+                </a:solidFill>
+                <a:latin typeface="Segoe UI"/>
+              </a:rPr>
+              <a:t>Review: Did the AI **change** the Gross Margin definition or **clarify** it?</a:t>
+            </a:r>
+          </a:p>
+          <a:p>
+            <a:pPr>
+              <a:spcBef>
+                <a:spcPts val="400"/>
+              </a:spcBef>
+              <a:spcAft>
+                <a:spcPts val="800"/>
+              </a:spcAft>
+            </a:pPr>
+            <a:r>
+              <a:rPr sz="1600">
+                <a:solidFill>
+                  <a:srgbClr val="2ECC71"/>
+                </a:solidFill>
+                <a:latin typeface="Segoe UI"/>
+              </a:rPr>
+              <a:t>●  </a:t>
+            </a:r>
+            <a:r>
+              <a:rPr sz="1800">
+                <a:solidFill>
+                  <a:srgbClr val="2C3E50"/>
+                </a:solidFill>
+                <a:latin typeface="Segoe UI"/>
+              </a:rPr>
+              <a:t>Is the new Gross Margin % metric approved by Finance?</a:t>
+            </a:r>
+          </a:p>
+          <a:p>
+            <a:pPr>
+              <a:spcBef>
+                <a:spcPts val="400"/>
+              </a:spcBef>
+              <a:spcAft>
+                <a:spcPts val="800"/>
+              </a:spcAft>
+            </a:pPr>
+            <a:r>
+              <a:rPr sz="1600">
+                <a:solidFill>
+                  <a:srgbClr val="2ECC71"/>
+                </a:solidFill>
+                <a:latin typeface="Segoe UI"/>
+              </a:rPr>
+              <a:t>●  </a:t>
+            </a:r>
+            <a:r>
+              <a:rPr sz="1800">
+                <a:solidFill>
+                  <a:srgbClr val="2C3E50"/>
+                </a:solidFill>
+                <a:latin typeface="Segoe UI"/>
+              </a:rPr>
+              <a:t>Decision: Keep, Revise, or Reject the PR?</a:t>
             </a:r>
           </a:p>
         </p:txBody>
@@ -11680,7 +11764,7 @@
                 </a:solidFill>
                 <a:latin typeface="Segoe UI"/>
               </a:rPr>
-              <a:t>Business meaning should not drift because wording improved.</a:t>
+              <a:t>Walk through the diff format. The `-` lines are removals, `+` lines are additions. The AI expanded the Gross Margin definition (likely an improvement) and added a new metric (Gross Margin %) that may not be approved. Ask: who owns the authority to add new KPIs? This is a real governance question that a code review alone cannot answer.</a:t>
             </a:r>
           </a:p>
         </p:txBody>
@@ -11878,7 +11962,7 @@
                 </a:solidFill>
                 <a:latin typeface="Segoe UI"/>
               </a:rPr>
-              <a:t>DS Example</a:t>
+              <a:t>DS Example -- Repo Diff Review</a:t>
             </a:r>
           </a:p>
         </p:txBody>
@@ -12007,7 +12091,7 @@
                 </a:solidFill>
                 <a:latin typeface="Segoe UI"/>
               </a:rPr>
-              <a:t>add notebook prerequisites and data snapshot notes</a:t>
+              <a:t>Scenario: Copilot updated a notebook prerequisites section. Review before merge.</a:t>
             </a:r>
           </a:p>
           <a:p>
@@ -12035,7 +12119,91 @@
                 </a:solidFill>
                 <a:latin typeface="Segoe UI"/>
               </a:rPr>
-              <a:t>do not change feature engineering or model logic</a:t>
+              <a:t>Python 3.10+</a:t>
+            </a:r>
+          </a:p>
+          <a:p>
+            <a:pPr>
+              <a:spcBef>
+                <a:spcPts val="400"/>
+              </a:spcBef>
+              <a:spcAft>
+                <a:spcPts val="800"/>
+              </a:spcAft>
+            </a:pPr>
+            <a:r>
+              <a:rPr sz="1600">
+                <a:solidFill>
+                  <a:srgbClr val="2ECC71"/>
+                </a:solidFill>
+                <a:latin typeface="Segoe UI"/>
+              </a:rPr>
+              <a:t>●  </a:t>
+            </a:r>
+            <a:r>
+              <a:rPr sz="1800">
+                <a:solidFill>
+                  <a:srgbClr val="2C3E50"/>
+                </a:solidFill>
+                <a:latin typeface="Segoe UI"/>
+              </a:rPr>
+              <a:t>Review: Is the Python version bump from 3.10 to 3.12 intentional or a side effect?</a:t>
+            </a:r>
+          </a:p>
+          <a:p>
+            <a:pPr>
+              <a:spcBef>
+                <a:spcPts val="400"/>
+              </a:spcBef>
+              <a:spcAft>
+                <a:spcPts val="800"/>
+              </a:spcAft>
+            </a:pPr>
+            <a:r>
+              <a:rPr sz="1600">
+                <a:solidFill>
+                  <a:srgbClr val="2ECC71"/>
+                </a:solidFill>
+                <a:latin typeface="Segoe UI"/>
+              </a:rPr>
+              <a:t>●  </a:t>
+            </a:r>
+            <a:r>
+              <a:rPr sz="1800">
+                <a:solidFill>
+                  <a:srgbClr val="2C3E50"/>
+                </a:solidFill>
+                <a:latin typeface="Segoe UI"/>
+              </a:rPr>
+              <a:t>Are the pinned package versions correct for this experiment?</a:t>
+            </a:r>
+          </a:p>
+          <a:p>
+            <a:pPr>
+              <a:spcBef>
+                <a:spcPts val="400"/>
+              </a:spcBef>
+              <a:spcAft>
+                <a:spcPts val="800"/>
+              </a:spcAft>
+            </a:pPr>
+            <a:r>
+              <a:rPr sz="1600">
+                <a:solidFill>
+                  <a:srgbClr val="2ECC71"/>
+                </a:solidFill>
+                <a:latin typeface="Segoe UI"/>
+              </a:rPr>
+              <a:t>●  </a:t>
+            </a:r>
+            <a:r>
+              <a:rPr sz="1800">
+                <a:solidFill>
+                  <a:srgbClr val="2C3E50"/>
+                </a:solidFill>
+                <a:latin typeface="Segoe UI"/>
+              </a:rPr>
+              <a:t>Decision: Keep, Revise, or Reject the PR?</a:t>
             </a:r>
           </a:p>
         </p:txBody>
@@ -12153,7 +12321,7 @@
                 </a:solidFill>
                 <a:latin typeface="Segoe UI"/>
               </a:rPr>
-              <a:t>Separate support content from analysis changes.</a:t>
+              <a:t>The AI upgraded Python 3.10 to 3.12 and added useful prerequisite details. But the version bump may break CI or team environments still on 3.10. Ask: did anyone request the Python upgrade? The data and seed additions are clearly helpful. The right call may be Revise -- keep the new lines but revert the Python version change.</a:t>
             </a:r>
           </a:p>
         </p:txBody>
@@ -12351,7 +12519,7 @@
                 </a:solidFill>
                 <a:latin typeface="Segoe UI"/>
               </a:rPr>
-              <a:t>DE Example</a:t>
+              <a:t>DE Example -- Repo Diff Review</a:t>
             </a:r>
           </a:p>
         </p:txBody>
@@ -12480,7 +12648,7 @@
                 </a:solidFill>
                 <a:latin typeface="Segoe UI"/>
               </a:rPr>
-              <a:t>improve troubleshooting notes for a pipeline runbook</a:t>
+              <a:t>Scenario: Copilot updated a pipeline runbook in the repo. Review before merge.</a:t>
             </a:r>
           </a:p>
           <a:p>
@@ -12508,7 +12676,119 @@
                 </a:solidFill>
                 <a:latin typeface="Segoe UI"/>
               </a:rPr>
-              <a:t>keep deployment order, rollback, and on-call steps unchanged</a:t>
+              <a:t>2. Retry the task manually if it failed.</a:t>
+            </a:r>
+          </a:p>
+          <a:p>
+            <a:pPr>
+              <a:spcBef>
+                <a:spcPts val="400"/>
+              </a:spcBef>
+              <a:spcAft>
+                <a:spcPts val="800"/>
+              </a:spcAft>
+            </a:pPr>
+            <a:r>
+              <a:rPr sz="1600">
+                <a:solidFill>
+                  <a:srgbClr val="2ECC71"/>
+                </a:solidFill>
+                <a:latin typeface="Segoe UI"/>
+              </a:rPr>
+              <a:t>●  </a:t>
+            </a:r>
+            <a:r>
+              <a:rPr sz="1800">
+                <a:solidFill>
+                  <a:srgbClr val="2C3E50"/>
+                </a:solidFill>
+                <a:latin typeface="Segoe UI"/>
+              </a:rPr>
+              <a:t>Restore from the previous partition snapshot.</a:t>
+            </a:r>
+          </a:p>
+          <a:p>
+            <a:pPr>
+              <a:spcBef>
+                <a:spcPts val="400"/>
+              </a:spcBef>
+              <a:spcAft>
+                <a:spcPts val="800"/>
+              </a:spcAft>
+            </a:pPr>
+            <a:r>
+              <a:rPr sz="1600">
+                <a:solidFill>
+                  <a:srgbClr val="2ECC71"/>
+                </a:solidFill>
+                <a:latin typeface="Segoe UI"/>
+              </a:rPr>
+              <a:t>●  </a:t>
+            </a:r>
+            <a:r>
+              <a:rPr sz="1800">
+                <a:solidFill>
+                  <a:srgbClr val="2C3E50"/>
+                </a:solidFill>
+                <a:latin typeface="Segoe UI"/>
+              </a:rPr>
+              <a:t>Review: Is the **escalation path** (page on-call DE) correct for your team?</a:t>
+            </a:r>
+          </a:p>
+          <a:p>
+            <a:pPr>
+              <a:spcBef>
+                <a:spcPts val="400"/>
+              </a:spcBef>
+              <a:spcAft>
+                <a:spcPts val="800"/>
+              </a:spcAft>
+            </a:pPr>
+            <a:r>
+              <a:rPr sz="1600">
+                <a:solidFill>
+                  <a:srgbClr val="2ECC71"/>
+                </a:solidFill>
+                <a:latin typeface="Segoe UI"/>
+              </a:rPr>
+              <a:t>●  </a:t>
+            </a:r>
+            <a:r>
+              <a:rPr sz="1800">
+                <a:solidFill>
+                  <a:srgbClr val="2C3E50"/>
+                </a:solidFill>
+                <a:latin typeface="Segoe UI"/>
+              </a:rPr>
+              <a:t>Should step 5 be a warning or a hard gate?</a:t>
+            </a:r>
+          </a:p>
+          <a:p>
+            <a:pPr>
+              <a:spcBef>
+                <a:spcPts val="400"/>
+              </a:spcBef>
+              <a:spcAft>
+                <a:spcPts val="800"/>
+              </a:spcAft>
+            </a:pPr>
+            <a:r>
+              <a:rPr sz="1600">
+                <a:solidFill>
+                  <a:srgbClr val="2ECC71"/>
+                </a:solidFill>
+                <a:latin typeface="Segoe UI"/>
+              </a:rPr>
+              <a:t>●  </a:t>
+            </a:r>
+            <a:r>
+              <a:rPr sz="1800">
+                <a:solidFill>
+                  <a:srgbClr val="2C3E50"/>
+                </a:solidFill>
+                <a:latin typeface="Segoe UI"/>
+              </a:rPr>
+              <a:t>Decision: Keep, Revise, or Reject the PR?</a:t>
             </a:r>
           </a:p>
         </p:txBody>
@@ -12626,7 +12906,7 @@
                 </a:solidFill>
                 <a:latin typeface="Segoe UI"/>
               </a:rPr>
-              <a:t>For DE work, reviewability and operational safety come first.</a:t>
+              <a:t>The AI replaced a vague "retry manually" step with a structured troubleshooting sequence. This is a clear improvement. But ask: is 3 retries correct? Is paging the on-call DE the right escalation, or should it go to the team lead first? Operational runbooks must match the actual incident process. The diff looks great, but the DE must verify every step against reality.</a:t>
             </a:r>
           </a:p>
         </p:txBody>
